--- a/public/fun/pack/pptx/family/가족소개_41_우리부부_아랫목.pptx
+++ b/public/fun/pack/pptx/family/가족소개_41_우리부부_아랫목.pptx
@@ -3286,6 +3286,14 @@
 <file path=ppt/slides/slide1.xml><?xml version="1.0" encoding="utf-8"?>
 <p:sld xmlns:a="http://schemas.openxmlformats.org/drawingml/2006/main" xmlns:p="http://schemas.openxmlformats.org/presentationml/2006/main" xmlns:r="http://schemas.openxmlformats.org/officeDocument/2006/relationships">
   <p:cSld>
+    <p:bg>
+      <p:bgPr>
+        <a:solidFill>
+          <a:srgbClr val="FBF0EC"/>
+        </a:solidFill>
+        <a:effectLst/>
+      </p:bgPr>
+    </p:bg>
     <p:spTree>
       <p:nvGrpSpPr>
         <p:cNvPr id="1" name=""/>
@@ -3293,30 +3301,120 @@
         <p:nvPr/>
       </p:nvGrpSpPr>
       <p:grpSpPr/>
-      <p:pic>
-        <p:nvPicPr>
-          <p:cNvPr id="3" name="표지 그림" descr="family-41.jpg"/>
-          <p:cNvPicPr>
-            <a:picLocks noChangeAspect="1"/>
-          </p:cNvPicPr>
+      <p:sp>
+        <p:nvSpPr>
+          <p:cNvPr id="3" name="사진 자리"/>
+          <p:cNvSpPr/>
           <p:nvPr/>
-        </p:nvPicPr>
-        <p:blipFill>
-          <a:blip r:embed="rId2"/>
-          <a:stretch>
-            <a:fillRect/>
-          </a:stretch>
-        </p:blipFill>
-        <p:spPr>
-          <a:xfrm>
-            <a:off x="0" y="0"/>
-            <a:ext cx="12191695" cy="6858000"/>
+        </p:nvSpPr>
+        <p:spPr>
+          <a:xfrm>
+            <a:off x="1463003" y="960120"/>
+            <a:ext cx="3657508" cy="4526280"/>
+          </a:xfrm>
+          <a:prstGeom prst="roundRect">
+            <a:avLst>
+              <a:gd name="adj" fmla="val 4000"/>
+            </a:avLst>
+          </a:prstGeom>
+          <a:solidFill>
+            <a:srgbClr val="EBBEAD"/>
+          </a:solidFill>
+          <a:ln>
+            <a:noFill/>
+          </a:ln>
+        </p:spPr>
+        <p:txBody>
+          <a:bodyPr rtlCol="0" anchor="ctr" wrap="square" lIns="54864" rIns="54864" tIns="27432" bIns="27432">
+            <a:noAutofit/>
+          </a:bodyPr>
+          <a:lstStyle/>
+          <a:p>
+            <a:pPr algn="ctr">
+              <a:lnSpc>
+                <a:spcPct val="100000"/>
+              </a:lnSpc>
+            </a:pPr>
+            <a:r>
+              <a:rPr sz="1400" b="0" i="0">
+                <a:solidFill>
+                  <a:srgbClr val="493027"/>
+                </a:solidFill>
+              </a:rPr>
+              <a:t>사진을 넣어 주세요</a:t>
+            </a:r>
+          </a:p>
+        </p:txBody>
+      </p:sp>
+      <p:sp>
+        <p:nvSpPr>
+          <p:cNvPr id="4" name="장식"/>
+          <p:cNvSpPr/>
+          <p:nvPr/>
+        </p:nvSpPr>
+        <p:spPr>
+          <a:xfrm>
+            <a:off x="975335" y="1234439"/>
+            <a:ext cx="3657508" cy="4526280"/>
+          </a:xfrm>
+          <a:prstGeom prst="roundRect">
+            <a:avLst>
+              <a:gd name="adj" fmla="val 4000"/>
+            </a:avLst>
+          </a:prstGeom>
+          <a:noFill/>
+          <a:ln w="9525">
+            <a:solidFill>
+              <a:srgbClr val="26231F"/>
+            </a:solidFill>
+          </a:ln>
+        </p:spPr>
+        <p:txBody>
+          <a:bodyPr rtlCol="0" anchor="ctr"/>
+          <a:lstStyle/>
+          <a:p>
+            <a:pPr algn="ctr"/>
+          </a:p>
+        </p:txBody>
+      </p:sp>
+      <p:sp>
+        <p:nvSpPr>
+          <p:cNvPr id="5" name="라벨"/>
+          <p:cNvSpPr txBox="1"/>
+          <p:nvPr/>
+        </p:nvSpPr>
+        <p:spPr>
+          <a:xfrm>
+            <a:off x="6827349" y="2148840"/>
+            <a:ext cx="4632844" cy="274320"/>
           </a:xfrm>
           <a:prstGeom prst="rect">
             <a:avLst/>
           </a:prstGeom>
-        </p:spPr>
-      </p:pic>
+          <a:noFill/>
+        </p:spPr>
+        <p:txBody>
+          <a:bodyPr wrap="square" lIns="54864" rIns="54864" tIns="27432" bIns="27432" anchor="t">
+            <a:noAutofit/>
+          </a:bodyPr>
+          <a:lstStyle/>
+          <a:p>
+            <a:pPr algn="l">
+              <a:lnSpc>
+                <a:spcPct val="115000"/>
+              </a:lnSpc>
+            </a:pPr>
+            <a:r>
+              <a:rPr sz="1000" b="1" i="0" spc="250">
+                <a:solidFill>
+                  <a:srgbClr val="26231F"/>
+                </a:solidFill>
+              </a:rPr>
+              <a:t>FAMILY ALBUM</a:t>
+            </a:r>
+          </a:p>
+        </p:txBody>
+      </p:sp>
       <p:sp>
         <p:nvSpPr>
           <p:cNvPr id="2" name="Title 1"/>
@@ -3329,8 +3427,8 @@
         </p:nvSpPr>
         <p:spPr>
           <a:xfrm>
-            <a:off x="853418" y="2057400"/>
-            <a:ext cx="6095847" cy="1554480"/>
+            <a:off x="6827349" y="2606040"/>
+            <a:ext cx="4632844" cy="1188720"/>
           </a:xfrm>
         </p:spPr>
         <p:txBody>
@@ -3345,9 +3443,9 @@
               </a:lnSpc>
             </a:pPr>
             <a:r>
-              <a:rPr sz="3600" b="1" i="0">
-                <a:solidFill>
-                  <a:srgbClr val="3B2017"/>
+              <a:rPr sz="4000" b="1" i="0">
+                <a:solidFill>
+                  <a:srgbClr val="26231F"/>
                 </a:solidFill>
               </a:rPr>
               <a:t>우리 가족을 소개합니다</a:t>
@@ -3357,14 +3455,14 @@
       </p:sp>
       <p:sp>
         <p:nvSpPr>
-          <p:cNvPr id="4" name="한 줄 문구"/>
+          <p:cNvPr id="6" name="한 줄 문구"/>
           <p:cNvSpPr txBox="1"/>
           <p:nvPr/>
         </p:nvSpPr>
         <p:spPr>
           <a:xfrm>
-            <a:off x="853418" y="3749039"/>
-            <a:ext cx="6095847" cy="822960"/>
+            <a:off x="6827349" y="3886200"/>
+            <a:ext cx="4632844" cy="822960"/>
           </a:xfrm>
           <a:prstGeom prst="rect">
             <a:avLst/>
@@ -3383,9 +3481,9 @@
               </a:lnSpc>
             </a:pPr>
             <a:r>
-              <a:rPr sz="1700" b="0" i="1">
-                <a:solidFill>
-                  <a:srgbClr val="3B2017"/>
+              <a:rPr sz="1700" b="0" i="0">
+                <a:solidFill>
+                  <a:srgbClr val="26231F"/>
                 </a:solidFill>
               </a:rPr>
               <a:t>아랫목에 이불 덮고 둘이</a:t>
@@ -3395,14 +3493,14 @@
       </p:sp>
       <p:sp>
         <p:nvSpPr>
-          <p:cNvPr id="5" name="안내 문구"/>
+          <p:cNvPr id="7" name="안내 문구"/>
           <p:cNvSpPr txBox="1"/>
           <p:nvPr/>
         </p:nvSpPr>
         <p:spPr>
           <a:xfrm>
-            <a:off x="853418" y="4617720"/>
-            <a:ext cx="6095847" cy="914400"/>
+            <a:off x="6827349" y="4754880"/>
+            <a:ext cx="4632844" cy="914400"/>
           </a:xfrm>
           <a:prstGeom prst="rect">
             <a:avLst/>
@@ -3423,10 +3521,10 @@
             <a:r>
               <a:rPr sz="1400" b="0" i="0">
                 <a:solidFill>
-                  <a:srgbClr val="666666"/>
+                  <a:srgbClr val="26231F"/>
                 </a:solidFill>
               </a:rPr>
-              <a:t>우리 부부 · 2027. 00. 00</a:t>
+              <a:t>우리 부부 · 날짜 입력</a:t>
             </a:r>
           </a:p>
         </p:txBody>
@@ -3445,7 +3543,7 @@
     <p:bg>
       <p:bgPr>
         <a:solidFill>
-          <a:srgbClr val="EFD9D1"/>
+          <a:srgbClr val="F6DED5"/>
         </a:solidFill>
         <a:effectLst/>
       </p:bgPr>
@@ -3465,20 +3563,86 @@
         </p:nvSpPr>
         <p:spPr>
           <a:xfrm>
-            <a:off x="274320" y="274320"/>
-            <a:ext cx="11643055" cy="6309360"/>
+            <a:off x="640080" y="566928"/>
+            <a:ext cx="64008" cy="868680"/>
+          </a:xfrm>
+          <a:prstGeom prst="roundRect">
+            <a:avLst>
+              <a:gd name="adj" fmla="val 50000"/>
+            </a:avLst>
+          </a:prstGeom>
+          <a:solidFill>
+            <a:srgbClr val="E1AC98"/>
+          </a:solidFill>
+          <a:ln>
+            <a:noFill/>
+          </a:ln>
+        </p:spPr>
+        <p:txBody>
+          <a:bodyPr rtlCol="0" anchor="ctr"/>
+          <a:lstStyle/>
+          <a:p>
+            <a:pPr algn="ctr"/>
+          </a:p>
+        </p:txBody>
+      </p:sp>
+      <p:sp>
+        <p:nvSpPr>
+          <p:cNvPr id="4" name="상단 라벨"/>
+          <p:cNvSpPr txBox="1"/>
+          <p:nvPr/>
+        </p:nvSpPr>
+        <p:spPr>
+          <a:xfrm>
+            <a:off x="868680" y="274320"/>
+            <a:ext cx="5486400" cy="274320"/>
           </a:xfrm>
           <a:prstGeom prst="rect">
             <a:avLst/>
           </a:prstGeom>
+          <a:noFill/>
+        </p:spPr>
+        <p:txBody>
+          <a:bodyPr wrap="square" lIns="54864" rIns="54864" tIns="27432" bIns="27432" anchor="ctr">
+            <a:noAutofit/>
+          </a:bodyPr>
+          <a:lstStyle/>
+          <a:p>
+            <a:pPr algn="l">
+              <a:lnSpc>
+                <a:spcPct val="115000"/>
+              </a:lnSpc>
+            </a:pPr>
+            <a:r>
+              <a:rPr sz="900" b="1" i="0" spc="250">
+                <a:solidFill>
+                  <a:srgbClr val="8E8780"/>
+                </a:solidFill>
+              </a:rPr>
+              <a:t>FAMILY ALBUM</a:t>
+            </a:r>
+          </a:p>
+        </p:txBody>
+      </p:sp>
+      <p:sp>
+        <p:nvSpPr>
+          <p:cNvPr id="5" name="포인트"/>
+          <p:cNvSpPr/>
+          <p:nvPr/>
+        </p:nvSpPr>
+        <p:spPr>
+          <a:xfrm rot="18900000">
+            <a:off x="11167567" y="667512"/>
+            <a:ext cx="310896" cy="310896"/>
+          </a:xfrm>
+          <a:prstGeom prst="teardrop">
+            <a:avLst/>
+          </a:prstGeom>
           <a:solidFill>
-            <a:srgbClr val="FFFFFF"/>
+            <a:srgbClr val="EBBEAD"/>
           </a:solidFill>
-          <a:ln w="25400">
-            <a:solidFill>
-              <a:srgbClr val="7D4531"/>
-            </a:solidFill>
-            <a:prstDash val="dash"/>
+          <a:ln>
+            <a:noFill/>
           </a:ln>
         </p:spPr>
         <p:txBody>
@@ -3501,8 +3665,8 @@
         </p:nvSpPr>
         <p:spPr>
           <a:xfrm>
-            <a:off x="777240" y="548640"/>
-            <a:ext cx="9357055" cy="822960"/>
+            <a:off x="868680" y="566928"/>
+            <a:ext cx="9448495" cy="868680"/>
           </a:xfrm>
         </p:spPr>
         <p:txBody>
@@ -3519,7 +3683,7 @@
             <a:r>
               <a:rPr sz="3000" b="1" i="0">
                 <a:solidFill>
-                  <a:srgbClr val="3B2017"/>
+                  <a:srgbClr val="26231F"/>
                 </a:solidFill>
               </a:rPr>
               <a:t>가족 구성원</a:t>
@@ -3529,25 +3693,23 @@
       </p:sp>
       <p:sp>
         <p:nvSpPr>
-          <p:cNvPr id="4" name="사진 자리"/>
+          <p:cNvPr id="6" name="사진 자리"/>
           <p:cNvSpPr/>
           <p:nvPr/>
         </p:nvSpPr>
         <p:spPr>
           <a:xfrm>
-            <a:off x="2213533" y="1554480"/>
-            <a:ext cx="2331720" cy="2331720"/>
+            <a:off x="2167813" y="1783080"/>
+            <a:ext cx="2286000" cy="2286000"/>
           </a:xfrm>
           <a:prstGeom prst="ellipse">
             <a:avLst/>
           </a:prstGeom>
           <a:solidFill>
-            <a:srgbClr val="EFD9D1"/>
+            <a:srgbClr val="F6DED5"/>
           </a:solidFill>
           <a:ln w="19050">
-            <a:solidFill>
-              <a:srgbClr val="7D4531"/>
-            </a:solidFill>
+            <a:noFill/>
             <a:prstDash val="dash"/>
           </a:ln>
         </p:spPr>
@@ -3565,7 +3727,7 @@
             <a:r>
               <a:rPr sz="1200" b="0" i="0">
                 <a:solidFill>
-                  <a:srgbClr val="3B2017"/>
+                  <a:srgbClr val="8E8780"/>
                 </a:solidFill>
               </a:rPr>
               <a:t>사진</a:t>
@@ -3575,14 +3737,14 @@
       </p:sp>
       <p:sp>
         <p:nvSpPr>
-          <p:cNvPr id="5" name="TextBox 4"/>
+          <p:cNvPr id="7" name="TextBox 6"/>
           <p:cNvSpPr txBox="1"/>
           <p:nvPr/>
         </p:nvSpPr>
         <p:spPr>
           <a:xfrm>
-            <a:off x="777240" y="3977639"/>
-            <a:ext cx="5204307" cy="411480"/>
+            <a:off x="640080" y="4160520"/>
+            <a:ext cx="5341467" cy="411480"/>
           </a:xfrm>
           <a:prstGeom prst="rect">
             <a:avLst/>
@@ -3603,7 +3765,7 @@
             <a:r>
               <a:rPr sz="1600" b="1" i="0">
                 <a:solidFill>
-                  <a:srgbClr val="3B2017"/>
+                  <a:srgbClr val="493027"/>
                 </a:solidFill>
               </a:rPr>
               <a:t>남편</a:t>
@@ -3613,14 +3775,14 @@
       </p:sp>
       <p:sp>
         <p:nvSpPr>
-          <p:cNvPr id="6" name="TextBox 5"/>
+          <p:cNvPr id="8" name="TextBox 7"/>
           <p:cNvSpPr txBox="1"/>
           <p:nvPr/>
         </p:nvSpPr>
         <p:spPr>
           <a:xfrm>
-            <a:off x="868680" y="4434840"/>
-            <a:ext cx="5021427" cy="1783079"/>
+            <a:off x="731519" y="4617720"/>
+            <a:ext cx="5158587" cy="1737360"/>
           </a:xfrm>
           <a:prstGeom prst="rect">
             <a:avLst/>
@@ -3681,25 +3843,23 @@
       </p:sp>
       <p:sp>
         <p:nvSpPr>
-          <p:cNvPr id="7" name="사진 자리"/>
+          <p:cNvPr id="9" name="사진 자리"/>
           <p:cNvSpPr/>
           <p:nvPr/>
         </p:nvSpPr>
         <p:spPr>
           <a:xfrm>
-            <a:off x="7646441" y="1554480"/>
-            <a:ext cx="2331720" cy="2331720"/>
+            <a:off x="7737881" y="1783080"/>
+            <a:ext cx="2286000" cy="2286000"/>
           </a:xfrm>
           <a:prstGeom prst="ellipse">
             <a:avLst/>
           </a:prstGeom>
           <a:solidFill>
-            <a:srgbClr val="EFD9D1"/>
+            <a:srgbClr val="F6DED5"/>
           </a:solidFill>
           <a:ln w="19050">
-            <a:solidFill>
-              <a:srgbClr val="7D4531"/>
-            </a:solidFill>
+            <a:noFill/>
             <a:prstDash val="dash"/>
           </a:ln>
         </p:spPr>
@@ -3717,7 +3877,7 @@
             <a:r>
               <a:rPr sz="1200" b="0" i="0">
                 <a:solidFill>
-                  <a:srgbClr val="3B2017"/>
+                  <a:srgbClr val="8E8780"/>
                 </a:solidFill>
               </a:rPr>
               <a:t>사진</a:t>
@@ -3727,14 +3887,14 @@
       </p:sp>
       <p:sp>
         <p:nvSpPr>
-          <p:cNvPr id="8" name="TextBox 7"/>
+          <p:cNvPr id="10" name="TextBox 9"/>
           <p:cNvSpPr txBox="1"/>
           <p:nvPr/>
         </p:nvSpPr>
         <p:spPr>
           <a:xfrm>
-            <a:off x="6210147" y="3977639"/>
-            <a:ext cx="5204307" cy="411480"/>
+            <a:off x="6210147" y="4160520"/>
+            <a:ext cx="5341467" cy="411480"/>
           </a:xfrm>
           <a:prstGeom prst="rect">
             <a:avLst/>
@@ -3755,7 +3915,7 @@
             <a:r>
               <a:rPr sz="1600" b="1" i="0">
                 <a:solidFill>
-                  <a:srgbClr val="3B2017"/>
+                  <a:srgbClr val="493027"/>
                 </a:solidFill>
               </a:rPr>
               <a:t>아내</a:t>
@@ -3765,14 +3925,14 @@
       </p:sp>
       <p:sp>
         <p:nvSpPr>
-          <p:cNvPr id="9" name="TextBox 8"/>
+          <p:cNvPr id="11" name="TextBox 10"/>
           <p:cNvSpPr txBox="1"/>
           <p:nvPr/>
         </p:nvSpPr>
         <p:spPr>
           <a:xfrm>
-            <a:off x="6301587" y="4434840"/>
-            <a:ext cx="5021427" cy="1783079"/>
+            <a:off x="6301587" y="4617720"/>
+            <a:ext cx="5158587" cy="1737360"/>
           </a:xfrm>
           <a:prstGeom prst="rect">
             <a:avLst/>
@@ -3845,7 +4005,7 @@
     <p:bg>
       <p:bgPr>
         <a:solidFill>
-          <a:srgbClr val="EFD9D1"/>
+          <a:srgbClr val="F6DED5"/>
         </a:solidFill>
         <a:effectLst/>
       </p:bgPr>
@@ -3865,20 +4025,86 @@
         </p:nvSpPr>
         <p:spPr>
           <a:xfrm>
-            <a:off x="274320" y="274320"/>
-            <a:ext cx="11643055" cy="6309360"/>
+            <a:off x="640080" y="566928"/>
+            <a:ext cx="64008" cy="868680"/>
+          </a:xfrm>
+          <a:prstGeom prst="roundRect">
+            <a:avLst>
+              <a:gd name="adj" fmla="val 50000"/>
+            </a:avLst>
+          </a:prstGeom>
+          <a:solidFill>
+            <a:srgbClr val="E1AC98"/>
+          </a:solidFill>
+          <a:ln>
+            <a:noFill/>
+          </a:ln>
+        </p:spPr>
+        <p:txBody>
+          <a:bodyPr rtlCol="0" anchor="ctr"/>
+          <a:lstStyle/>
+          <a:p>
+            <a:pPr algn="ctr"/>
+          </a:p>
+        </p:txBody>
+      </p:sp>
+      <p:sp>
+        <p:nvSpPr>
+          <p:cNvPr id="4" name="상단 라벨"/>
+          <p:cNvSpPr txBox="1"/>
+          <p:nvPr/>
+        </p:nvSpPr>
+        <p:spPr>
+          <a:xfrm>
+            <a:off x="868680" y="274320"/>
+            <a:ext cx="5486400" cy="274320"/>
           </a:xfrm>
           <a:prstGeom prst="rect">
             <a:avLst/>
           </a:prstGeom>
+          <a:noFill/>
+        </p:spPr>
+        <p:txBody>
+          <a:bodyPr wrap="square" lIns="54864" rIns="54864" tIns="27432" bIns="27432" anchor="ctr">
+            <a:noAutofit/>
+          </a:bodyPr>
+          <a:lstStyle/>
+          <a:p>
+            <a:pPr algn="l">
+              <a:lnSpc>
+                <a:spcPct val="115000"/>
+              </a:lnSpc>
+            </a:pPr>
+            <a:r>
+              <a:rPr sz="900" b="1" i="0" spc="250">
+                <a:solidFill>
+                  <a:srgbClr val="8E8780"/>
+                </a:solidFill>
+              </a:rPr>
+              <a:t>FAMILY ALBUM</a:t>
+            </a:r>
+          </a:p>
+        </p:txBody>
+      </p:sp>
+      <p:sp>
+        <p:nvSpPr>
+          <p:cNvPr id="5" name="포인트"/>
+          <p:cNvSpPr/>
+          <p:nvPr/>
+        </p:nvSpPr>
+        <p:spPr>
+          <a:xfrm rot="18900000">
+            <a:off x="11167567" y="667512"/>
+            <a:ext cx="310896" cy="310896"/>
+          </a:xfrm>
+          <a:prstGeom prst="teardrop">
+            <a:avLst/>
+          </a:prstGeom>
           <a:solidFill>
-            <a:srgbClr val="FFFFFF"/>
+            <a:srgbClr val="EBBEAD"/>
           </a:solidFill>
-          <a:ln w="25400">
-            <a:solidFill>
-              <a:srgbClr val="7D4531"/>
-            </a:solidFill>
-            <a:prstDash val="dash"/>
+          <a:ln>
+            <a:noFill/>
           </a:ln>
         </p:spPr>
         <p:txBody>
@@ -3901,8 +4127,8 @@
         </p:nvSpPr>
         <p:spPr>
           <a:xfrm>
-            <a:off x="777240" y="548640"/>
-            <a:ext cx="9357055" cy="822960"/>
+            <a:off x="868680" y="566928"/>
+            <a:ext cx="9448495" cy="868680"/>
           </a:xfrm>
         </p:spPr>
         <p:txBody>
@@ -3919,7 +4145,7 @@
             <a:r>
               <a:rPr sz="3000" b="1" i="0">
                 <a:solidFill>
-                  <a:srgbClr val="3B2017"/>
+                  <a:srgbClr val="26231F"/>
                 </a:solidFill>
               </a:rPr>
               <a:t>우리 가족 이야기</a:t>
@@ -3929,20 +4155,20 @@
       </p:sp>
       <p:sp>
         <p:nvSpPr>
-          <p:cNvPr id="4" name="타임라인 선"/>
+          <p:cNvPr id="6" name="타임라인 선"/>
           <p:cNvSpPr/>
           <p:nvPr/>
         </p:nvSpPr>
         <p:spPr>
           <a:xfrm>
-            <a:off x="777240" y="3291840"/>
-            <a:ext cx="10637215" cy="54864"/>
+            <a:off x="640080" y="3520440"/>
+            <a:ext cx="10911535" cy="54864"/>
           </a:xfrm>
           <a:prstGeom prst="rect">
             <a:avLst/>
           </a:prstGeom>
           <a:solidFill>
-            <a:srgbClr val="EFD9D1"/>
+            <a:srgbClr val="F6DED5"/>
           </a:solidFill>
           <a:ln>
             <a:noFill/>
@@ -3958,20 +4184,20 @@
       </p:sp>
       <p:sp>
         <p:nvSpPr>
-          <p:cNvPr id="5" name="때 1"/>
+          <p:cNvPr id="7" name="때 1"/>
           <p:cNvSpPr/>
           <p:nvPr/>
         </p:nvSpPr>
         <p:spPr>
           <a:xfrm>
-            <a:off x="1905723" y="3108960"/>
+            <a:off x="1802853" y="3337560"/>
             <a:ext cx="402336" cy="402336"/>
           </a:xfrm>
           <a:prstGeom prst="ellipse">
             <a:avLst/>
           </a:prstGeom>
           <a:solidFill>
-            <a:srgbClr val="7D4531"/>
+            <a:srgbClr val="E1AC98"/>
           </a:solidFill>
           <a:ln w="38100">
             <a:solidFill>
@@ -3989,14 +4215,14 @@
       </p:sp>
       <p:sp>
         <p:nvSpPr>
-          <p:cNvPr id="6" name="TextBox 5"/>
+          <p:cNvPr id="8" name="TextBox 7"/>
           <p:cNvSpPr txBox="1"/>
           <p:nvPr/>
         </p:nvSpPr>
         <p:spPr>
           <a:xfrm>
-            <a:off x="822959" y="2468880"/>
-            <a:ext cx="2567863" cy="457200"/>
+            <a:off x="685800" y="2697480"/>
+            <a:ext cx="2636443" cy="457200"/>
           </a:xfrm>
           <a:prstGeom prst="rect">
             <a:avLst/>
@@ -4017,7 +4243,7 @@
             <a:r>
               <a:rPr sz="1600" b="1" i="0">
                 <a:solidFill>
-                  <a:srgbClr val="7D4531"/>
+                  <a:srgbClr val="E1AC98"/>
                 </a:solidFill>
               </a:rPr>
               <a:t>처음 만난 날</a:t>
@@ -4027,14 +4253,14 @@
       </p:sp>
       <p:sp>
         <p:nvSpPr>
-          <p:cNvPr id="7" name="TextBox 6"/>
+          <p:cNvPr id="9" name="TextBox 8"/>
           <p:cNvSpPr txBox="1"/>
           <p:nvPr/>
         </p:nvSpPr>
         <p:spPr>
           <a:xfrm>
-            <a:off x="868679" y="3657600"/>
-            <a:ext cx="2476423" cy="457200"/>
+            <a:off x="731519" y="3886200"/>
+            <a:ext cx="2545003" cy="457200"/>
           </a:xfrm>
           <a:prstGeom prst="rect">
             <a:avLst/>
@@ -4055,7 +4281,7 @@
             <a:r>
               <a:rPr sz="1800" b="1" i="0">
                 <a:solidFill>
-                  <a:srgbClr val="3B2017"/>
+                  <a:srgbClr val="493027"/>
                 </a:solidFill>
               </a:rPr>
               <a:t>첫 만남</a:t>
@@ -4065,14 +4291,14 @@
       </p:sp>
       <p:sp>
         <p:nvSpPr>
-          <p:cNvPr id="8" name="TextBox 7"/>
+          <p:cNvPr id="10" name="TextBox 9"/>
           <p:cNvSpPr txBox="1"/>
           <p:nvPr/>
         </p:nvSpPr>
         <p:spPr>
           <a:xfrm>
-            <a:off x="868679" y="4160520"/>
-            <a:ext cx="2476423" cy="1645920"/>
+            <a:off x="731519" y="4389120"/>
+            <a:ext cx="2545003" cy="1645920"/>
           </a:xfrm>
           <a:prstGeom prst="rect">
             <a:avLst/>
@@ -4093,7 +4319,7 @@
             <a:r>
               <a:rPr sz="1500" b="0" i="0">
                 <a:solidFill>
-                  <a:srgbClr val="2B2B2B"/>
+                  <a:srgbClr val="26231F"/>
                 </a:solidFill>
               </a:rPr>
               <a:t>어디에서 어떻게 만났나요?</a:t>
@@ -4103,20 +4329,20 @@
       </p:sp>
       <p:sp>
         <p:nvSpPr>
-          <p:cNvPr id="9" name="때 2"/>
+          <p:cNvPr id="11" name="때 2"/>
           <p:cNvSpPr/>
           <p:nvPr/>
         </p:nvSpPr>
         <p:spPr>
           <a:xfrm>
-            <a:off x="4565027" y="3108960"/>
+            <a:off x="4530737" y="3337560"/>
             <a:ext cx="402336" cy="402336"/>
           </a:xfrm>
           <a:prstGeom prst="ellipse">
             <a:avLst/>
           </a:prstGeom>
           <a:solidFill>
-            <a:srgbClr val="7D4531"/>
+            <a:srgbClr val="E1AC98"/>
           </a:solidFill>
           <a:ln w="38100">
             <a:solidFill>
@@ -4134,14 +4360,14 @@
       </p:sp>
       <p:sp>
         <p:nvSpPr>
-          <p:cNvPr id="10" name="TextBox 9"/>
+          <p:cNvPr id="12" name="TextBox 11"/>
           <p:cNvSpPr txBox="1"/>
           <p:nvPr/>
         </p:nvSpPr>
         <p:spPr>
           <a:xfrm>
-            <a:off x="3482263" y="2468880"/>
-            <a:ext cx="2567863" cy="457200"/>
+            <a:off x="3413683" y="2697480"/>
+            <a:ext cx="2636443" cy="457200"/>
           </a:xfrm>
           <a:prstGeom prst="rect">
             <a:avLst/>
@@ -4162,7 +4388,7 @@
             <a:r>
               <a:rPr sz="1600" b="1" i="0">
                 <a:solidFill>
-                  <a:srgbClr val="7D4531"/>
+                  <a:srgbClr val="E1AC98"/>
                 </a:solidFill>
               </a:rPr>
               <a:t>결혼</a:t>
@@ -4172,14 +4398,14 @@
       </p:sp>
       <p:sp>
         <p:nvSpPr>
-          <p:cNvPr id="11" name="TextBox 10"/>
+          <p:cNvPr id="13" name="TextBox 12"/>
           <p:cNvSpPr txBox="1"/>
           <p:nvPr/>
         </p:nvSpPr>
         <p:spPr>
           <a:xfrm>
-            <a:off x="3527983" y="3657600"/>
-            <a:ext cx="2476423" cy="457200"/>
+            <a:off x="3459403" y="3886200"/>
+            <a:ext cx="2545003" cy="457200"/>
           </a:xfrm>
           <a:prstGeom prst="rect">
             <a:avLst/>
@@ -4200,7 +4426,7 @@
             <a:r>
               <a:rPr sz="1800" b="1" i="0">
                 <a:solidFill>
-                  <a:srgbClr val="3B2017"/>
+                  <a:srgbClr val="493027"/>
                 </a:solidFill>
               </a:rPr>
               <a:t>함께 시작한 날</a:t>
@@ -4210,14 +4436,14 @@
       </p:sp>
       <p:sp>
         <p:nvSpPr>
-          <p:cNvPr id="12" name="TextBox 11"/>
+          <p:cNvPr id="14" name="TextBox 13"/>
           <p:cNvSpPr txBox="1"/>
           <p:nvPr/>
         </p:nvSpPr>
         <p:spPr>
           <a:xfrm>
-            <a:off x="3527983" y="4160520"/>
-            <a:ext cx="2476423" cy="1645920"/>
+            <a:off x="3459403" y="4389120"/>
+            <a:ext cx="2545003" cy="1645920"/>
           </a:xfrm>
           <a:prstGeom prst="rect">
             <a:avLst/>
@@ -4238,7 +4464,7 @@
             <a:r>
               <a:rPr sz="1500" b="0" i="0">
                 <a:solidFill>
-                  <a:srgbClr val="2B2B2B"/>
+                  <a:srgbClr val="26231F"/>
                 </a:solidFill>
               </a:rPr>
               <a:t>그날의 기억을 적어요</a:t>
@@ -4248,20 +4474,20 @@
       </p:sp>
       <p:sp>
         <p:nvSpPr>
-          <p:cNvPr id="13" name="때 3"/>
+          <p:cNvPr id="15" name="때 3"/>
           <p:cNvSpPr/>
           <p:nvPr/>
         </p:nvSpPr>
         <p:spPr>
           <a:xfrm>
-            <a:off x="7224331" y="3108960"/>
+            <a:off x="7258621" y="3337560"/>
             <a:ext cx="402336" cy="402336"/>
           </a:xfrm>
           <a:prstGeom prst="ellipse">
             <a:avLst/>
           </a:prstGeom>
           <a:solidFill>
-            <a:srgbClr val="7D4531"/>
+            <a:srgbClr val="E1AC98"/>
           </a:solidFill>
           <a:ln w="38100">
             <a:solidFill>
@@ -4279,14 +4505,14 @@
       </p:sp>
       <p:sp>
         <p:nvSpPr>
-          <p:cNvPr id="14" name="TextBox 13"/>
+          <p:cNvPr id="16" name="TextBox 15"/>
           <p:cNvSpPr txBox="1"/>
           <p:nvPr/>
         </p:nvSpPr>
         <p:spPr>
           <a:xfrm>
-            <a:off x="6141567" y="2468880"/>
-            <a:ext cx="2567863" cy="457200"/>
+            <a:off x="6141567" y="2697480"/>
+            <a:ext cx="2636443" cy="457200"/>
           </a:xfrm>
           <a:prstGeom prst="rect">
             <a:avLst/>
@@ -4307,7 +4533,7 @@
             <a:r>
               <a:rPr sz="1600" b="1" i="0">
                 <a:solidFill>
-                  <a:srgbClr val="7D4531"/>
+                  <a:srgbClr val="E1AC98"/>
                 </a:solidFill>
               </a:rPr>
               <a:t>첫 집</a:t>
@@ -4317,14 +4543,14 @@
       </p:sp>
       <p:sp>
         <p:nvSpPr>
-          <p:cNvPr id="15" name="TextBox 14"/>
+          <p:cNvPr id="17" name="TextBox 16"/>
           <p:cNvSpPr txBox="1"/>
           <p:nvPr/>
         </p:nvSpPr>
         <p:spPr>
           <a:xfrm>
-            <a:off x="6187287" y="3657600"/>
-            <a:ext cx="2476423" cy="457200"/>
+            <a:off x="6187287" y="3886200"/>
+            <a:ext cx="2545003" cy="457200"/>
           </a:xfrm>
           <a:prstGeom prst="rect">
             <a:avLst/>
@@ -4345,7 +4571,7 @@
             <a:r>
               <a:rPr sz="1800" b="1" i="0">
                 <a:solidFill>
-                  <a:srgbClr val="3B2017"/>
+                  <a:srgbClr val="493027"/>
                 </a:solidFill>
               </a:rPr>
               <a:t>우리의 보금자리</a:t>
@@ -4355,14 +4581,14 @@
       </p:sp>
       <p:sp>
         <p:nvSpPr>
-          <p:cNvPr id="16" name="TextBox 15"/>
+          <p:cNvPr id="18" name="TextBox 17"/>
           <p:cNvSpPr txBox="1"/>
           <p:nvPr/>
         </p:nvSpPr>
         <p:spPr>
           <a:xfrm>
-            <a:off x="6187287" y="4160520"/>
-            <a:ext cx="2476423" cy="1645920"/>
+            <a:off x="6187287" y="4389120"/>
+            <a:ext cx="2545003" cy="1645920"/>
           </a:xfrm>
           <a:prstGeom prst="rect">
             <a:avLst/>
@@ -4383,7 +4609,7 @@
             <a:r>
               <a:rPr sz="1500" b="0" i="0">
                 <a:solidFill>
-                  <a:srgbClr val="2B2B2B"/>
+                  <a:srgbClr val="26231F"/>
                 </a:solidFill>
               </a:rPr>
               <a:t>처음 이사한 날</a:t>
@@ -4393,20 +4619,20 @@
       </p:sp>
       <p:sp>
         <p:nvSpPr>
-          <p:cNvPr id="17" name="때 4"/>
+          <p:cNvPr id="19" name="때 4"/>
           <p:cNvSpPr/>
           <p:nvPr/>
         </p:nvSpPr>
         <p:spPr>
           <a:xfrm>
-            <a:off x="9883635" y="3108960"/>
+            <a:off x="9986505" y="3337560"/>
             <a:ext cx="402336" cy="402336"/>
           </a:xfrm>
           <a:prstGeom prst="ellipse">
             <a:avLst/>
           </a:prstGeom>
           <a:solidFill>
-            <a:srgbClr val="7D4531"/>
+            <a:srgbClr val="E1AC98"/>
           </a:solidFill>
           <a:ln w="38100">
             <a:solidFill>
@@ -4424,14 +4650,14 @@
       </p:sp>
       <p:sp>
         <p:nvSpPr>
-          <p:cNvPr id="18" name="TextBox 17"/>
+          <p:cNvPr id="20" name="TextBox 19"/>
           <p:cNvSpPr txBox="1"/>
           <p:nvPr/>
         </p:nvSpPr>
         <p:spPr>
           <a:xfrm>
-            <a:off x="8800871" y="2468880"/>
-            <a:ext cx="2567863" cy="457200"/>
+            <a:off x="8869451" y="2697480"/>
+            <a:ext cx="2636443" cy="457200"/>
           </a:xfrm>
           <a:prstGeom prst="rect">
             <a:avLst/>
@@ -4452,7 +4678,7 @@
             <a:r>
               <a:rPr sz="1600" b="1" i="0">
                 <a:solidFill>
-                  <a:srgbClr val="7D4531"/>
+                  <a:srgbClr val="E1AC98"/>
                 </a:solidFill>
               </a:rPr>
               <a:t>지금</a:t>
@@ -4462,14 +4688,14 @@
       </p:sp>
       <p:sp>
         <p:nvSpPr>
-          <p:cNvPr id="19" name="TextBox 18"/>
+          <p:cNvPr id="21" name="TextBox 20"/>
           <p:cNvSpPr txBox="1"/>
           <p:nvPr/>
         </p:nvSpPr>
         <p:spPr>
           <a:xfrm>
-            <a:off x="8846591" y="3657600"/>
-            <a:ext cx="2476423" cy="457200"/>
+            <a:off x="8915171" y="3886200"/>
+            <a:ext cx="2545003" cy="457200"/>
           </a:xfrm>
           <a:prstGeom prst="rect">
             <a:avLst/>
@@ -4490,7 +4716,7 @@
             <a:r>
               <a:rPr sz="1800" b="1" i="0">
                 <a:solidFill>
-                  <a:srgbClr val="3B2017"/>
+                  <a:srgbClr val="493027"/>
                 </a:solidFill>
               </a:rPr>
               <a:t>오늘의 우리</a:t>
@@ -4500,14 +4726,14 @@
       </p:sp>
       <p:sp>
         <p:nvSpPr>
-          <p:cNvPr id="20" name="TextBox 19"/>
+          <p:cNvPr id="22" name="TextBox 21"/>
           <p:cNvSpPr txBox="1"/>
           <p:nvPr/>
         </p:nvSpPr>
         <p:spPr>
           <a:xfrm>
-            <a:off x="8846591" y="4160520"/>
-            <a:ext cx="2476423" cy="1645920"/>
+            <a:off x="8915171" y="4389120"/>
+            <a:ext cx="2545003" cy="1645920"/>
           </a:xfrm>
           <a:prstGeom prst="rect">
             <a:avLst/>
@@ -4528,7 +4754,7 @@
             <a:r>
               <a:rPr sz="1500" b="0" i="0">
                 <a:solidFill>
-                  <a:srgbClr val="2B2B2B"/>
+                  <a:srgbClr val="26231F"/>
                 </a:solidFill>
               </a:rPr>
               <a:t>요즘 우리 이야기</a:t>
@@ -4550,7 +4776,7 @@
     <p:bg>
       <p:bgPr>
         <a:solidFill>
-          <a:srgbClr val="EFD9D1"/>
+          <a:srgbClr val="F6DED5"/>
         </a:solidFill>
         <a:effectLst/>
       </p:bgPr>
@@ -4570,20 +4796,86 @@
         </p:nvSpPr>
         <p:spPr>
           <a:xfrm>
-            <a:off x="274320" y="274320"/>
-            <a:ext cx="11643055" cy="6309360"/>
+            <a:off x="640080" y="566928"/>
+            <a:ext cx="64008" cy="868680"/>
+          </a:xfrm>
+          <a:prstGeom prst="roundRect">
+            <a:avLst>
+              <a:gd name="adj" fmla="val 50000"/>
+            </a:avLst>
+          </a:prstGeom>
+          <a:solidFill>
+            <a:srgbClr val="E1AC98"/>
+          </a:solidFill>
+          <a:ln>
+            <a:noFill/>
+          </a:ln>
+        </p:spPr>
+        <p:txBody>
+          <a:bodyPr rtlCol="0" anchor="ctr"/>
+          <a:lstStyle/>
+          <a:p>
+            <a:pPr algn="ctr"/>
+          </a:p>
+        </p:txBody>
+      </p:sp>
+      <p:sp>
+        <p:nvSpPr>
+          <p:cNvPr id="4" name="상단 라벨"/>
+          <p:cNvSpPr txBox="1"/>
+          <p:nvPr/>
+        </p:nvSpPr>
+        <p:spPr>
+          <a:xfrm>
+            <a:off x="868680" y="274320"/>
+            <a:ext cx="5486400" cy="274320"/>
           </a:xfrm>
           <a:prstGeom prst="rect">
             <a:avLst/>
           </a:prstGeom>
+          <a:noFill/>
+        </p:spPr>
+        <p:txBody>
+          <a:bodyPr wrap="square" lIns="54864" rIns="54864" tIns="27432" bIns="27432" anchor="ctr">
+            <a:noAutofit/>
+          </a:bodyPr>
+          <a:lstStyle/>
+          <a:p>
+            <a:pPr algn="l">
+              <a:lnSpc>
+                <a:spcPct val="115000"/>
+              </a:lnSpc>
+            </a:pPr>
+            <a:r>
+              <a:rPr sz="900" b="1" i="0" spc="250">
+                <a:solidFill>
+                  <a:srgbClr val="8E8780"/>
+                </a:solidFill>
+              </a:rPr>
+              <a:t>FAMILY ALBUM</a:t>
+            </a:r>
+          </a:p>
+        </p:txBody>
+      </p:sp>
+      <p:sp>
+        <p:nvSpPr>
+          <p:cNvPr id="5" name="포인트"/>
+          <p:cNvSpPr/>
+          <p:nvPr/>
+        </p:nvSpPr>
+        <p:spPr>
+          <a:xfrm rot="18900000">
+            <a:off x="11167567" y="667512"/>
+            <a:ext cx="310896" cy="310896"/>
+          </a:xfrm>
+          <a:prstGeom prst="teardrop">
+            <a:avLst/>
+          </a:prstGeom>
           <a:solidFill>
-            <a:srgbClr val="FFFFFF"/>
+            <a:srgbClr val="EBBEAD"/>
           </a:solidFill>
-          <a:ln w="25400">
-            <a:solidFill>
-              <a:srgbClr val="7D4531"/>
-            </a:solidFill>
-            <a:prstDash val="dash"/>
+          <a:ln>
+            <a:noFill/>
           </a:ln>
         </p:spPr>
         <p:txBody>
@@ -4606,8 +4898,8 @@
         </p:nvSpPr>
         <p:spPr>
           <a:xfrm>
-            <a:off x="777240" y="548640"/>
-            <a:ext cx="9357055" cy="822960"/>
+            <a:off x="868680" y="566928"/>
+            <a:ext cx="9448495" cy="868680"/>
           </a:xfrm>
         </p:spPr>
         <p:txBody>
@@ -4624,7 +4916,7 @@
             <a:r>
               <a:rPr sz="3000" b="1" i="0">
                 <a:solidFill>
-                  <a:srgbClr val="3B2017"/>
+                  <a:srgbClr val="26231F"/>
                 </a:solidFill>
               </a:rPr>
               <a:t>우리 가족의 약속</a:t>
@@ -4634,56 +4926,54 @@
       </p:sp>
       <p:sp>
         <p:nvSpPr>
-          <p:cNvPr id="4" name="줄 1"/>
+          <p:cNvPr id="6" name="줄 1"/>
           <p:cNvSpPr/>
           <p:nvPr/>
         </p:nvSpPr>
         <p:spPr>
           <a:xfrm>
-            <a:off x="777240" y="1554480"/>
-            <a:ext cx="10637215" cy="1005840"/>
+            <a:off x="640080" y="1783080"/>
+            <a:ext cx="10911535" cy="1005840"/>
           </a:xfrm>
           <a:prstGeom prst="roundRect">
             <a:avLst>
-              <a:gd name="adj" fmla="val 8000"/>
+              <a:gd name="adj" fmla="val 7000"/>
             </a:avLst>
           </a:prstGeom>
           <a:solidFill>
-            <a:srgbClr val="F9F3F0"/>
-          </a:solidFill>
-          <a:ln w="12700">
-            <a:solidFill>
-              <a:srgbClr val="EFD9D1"/>
-            </a:solidFill>
-          </a:ln>
-        </p:spPr>
-        <p:txBody>
-          <a:bodyPr rtlCol="0" anchor="ctr"/>
-          <a:lstStyle/>
-          <a:p>
-            <a:pPr algn="ctr"/>
-          </a:p>
-        </p:txBody>
-      </p:sp>
-      <p:sp>
-        <p:nvSpPr>
-          <p:cNvPr id="5" name="번호 1"/>
-          <p:cNvSpPr/>
-          <p:nvPr/>
-        </p:nvSpPr>
-        <p:spPr>
-          <a:xfrm>
-            <a:off x="960120" y="1828800"/>
-            <a:ext cx="457200" cy="457200"/>
-          </a:xfrm>
-          <a:prstGeom prst="ellipse">
-            <a:avLst/>
-          </a:prstGeom>
-          <a:solidFill>
-            <a:srgbClr val="7D4531"/>
+            <a:srgbClr val="FBF0EC"/>
           </a:solidFill>
           <a:ln>
             <a:noFill/>
+          </a:ln>
+        </p:spPr>
+        <p:txBody>
+          <a:bodyPr rtlCol="0" anchor="ctr"/>
+          <a:lstStyle/>
+          <a:p>
+            <a:pPr algn="ctr"/>
+          </a:p>
+        </p:txBody>
+      </p:sp>
+      <p:sp>
+        <p:nvSpPr>
+          <p:cNvPr id="7" name="번호 1"/>
+          <p:cNvSpPr/>
+          <p:nvPr/>
+        </p:nvSpPr>
+        <p:spPr>
+          <a:xfrm>
+            <a:off x="822959" y="2057400"/>
+            <a:ext cx="457200" cy="457200"/>
+          </a:xfrm>
+          <a:prstGeom prst="ellipse">
+            <a:avLst/>
+          </a:prstGeom>
+          <a:noFill/>
+          <a:ln w="19050">
+            <a:solidFill>
+              <a:srgbClr val="E1AC98"/>
+            </a:solidFill>
           </a:ln>
         </p:spPr>
         <p:txBody>
@@ -4700,7 +4990,7 @@
             <a:r>
               <a:rPr sz="1600" b="1" i="0">
                 <a:solidFill>
-                  <a:srgbClr val="FFFFFF"/>
+                  <a:srgbClr val="493027"/>
                 </a:solidFill>
               </a:rPr>
               <a:t>1</a:t>
@@ -4710,13 +5000,13 @@
       </p:sp>
       <p:sp>
         <p:nvSpPr>
-          <p:cNvPr id="6" name="TextBox 5"/>
+          <p:cNvPr id="8" name="TextBox 7"/>
           <p:cNvSpPr txBox="1"/>
           <p:nvPr/>
         </p:nvSpPr>
         <p:spPr>
           <a:xfrm>
-            <a:off x="1645919" y="1600200"/>
+            <a:off x="1508760" y="1828800"/>
             <a:ext cx="2743200" cy="914400"/>
           </a:xfrm>
           <a:prstGeom prst="rect">
@@ -4738,7 +5028,7 @@
             <a:r>
               <a:rPr sz="1800" b="1" i="0">
                 <a:solidFill>
-                  <a:srgbClr val="3B2017"/>
+                  <a:srgbClr val="493027"/>
                 </a:solidFill>
               </a:rPr>
               <a:t>약속 1</a:t>
@@ -4748,14 +5038,14 @@
       </p:sp>
       <p:sp>
         <p:nvSpPr>
-          <p:cNvPr id="7" name="TextBox 6"/>
+          <p:cNvPr id="9" name="TextBox 8"/>
           <p:cNvSpPr txBox="1"/>
           <p:nvPr/>
         </p:nvSpPr>
         <p:spPr>
           <a:xfrm>
-            <a:off x="4434840" y="1600200"/>
-            <a:ext cx="6796735" cy="914400"/>
+            <a:off x="4297680" y="1828800"/>
+            <a:ext cx="7071055" cy="914400"/>
           </a:xfrm>
           <a:prstGeom prst="rect">
             <a:avLst/>
@@ -4776,7 +5066,7 @@
             <a:r>
               <a:rPr sz="1700" b="0" i="0">
                 <a:solidFill>
-                  <a:srgbClr val="2B2B2B"/>
+                  <a:srgbClr val="26231F"/>
                 </a:solidFill>
               </a:rPr>
               <a:t>하루에 한 번 서로 안아 주기</a:t>
@@ -4786,56 +5076,54 @@
       </p:sp>
       <p:sp>
         <p:nvSpPr>
-          <p:cNvPr id="8" name="줄 2"/>
+          <p:cNvPr id="10" name="줄 2"/>
           <p:cNvSpPr/>
           <p:nvPr/>
         </p:nvSpPr>
         <p:spPr>
           <a:xfrm>
-            <a:off x="777240" y="2697480"/>
-            <a:ext cx="10637215" cy="1005840"/>
+            <a:off x="640080" y="2926080"/>
+            <a:ext cx="10911535" cy="1005840"/>
           </a:xfrm>
           <a:prstGeom prst="roundRect">
             <a:avLst>
-              <a:gd name="adj" fmla="val 8000"/>
+              <a:gd name="adj" fmla="val 7000"/>
             </a:avLst>
           </a:prstGeom>
           <a:solidFill>
-            <a:srgbClr val="F9F3F0"/>
-          </a:solidFill>
-          <a:ln w="12700">
-            <a:solidFill>
-              <a:srgbClr val="EFD9D1"/>
-            </a:solidFill>
-          </a:ln>
-        </p:spPr>
-        <p:txBody>
-          <a:bodyPr rtlCol="0" anchor="ctr"/>
-          <a:lstStyle/>
-          <a:p>
-            <a:pPr algn="ctr"/>
-          </a:p>
-        </p:txBody>
-      </p:sp>
-      <p:sp>
-        <p:nvSpPr>
-          <p:cNvPr id="9" name="번호 2"/>
-          <p:cNvSpPr/>
-          <p:nvPr/>
-        </p:nvSpPr>
-        <p:spPr>
-          <a:xfrm>
-            <a:off x="960120" y="2971800"/>
-            <a:ext cx="457200" cy="457200"/>
-          </a:xfrm>
-          <a:prstGeom prst="ellipse">
-            <a:avLst/>
-          </a:prstGeom>
-          <a:solidFill>
-            <a:srgbClr val="7D4531"/>
+            <a:srgbClr val="FBF0EC"/>
           </a:solidFill>
           <a:ln>
             <a:noFill/>
+          </a:ln>
+        </p:spPr>
+        <p:txBody>
+          <a:bodyPr rtlCol="0" anchor="ctr"/>
+          <a:lstStyle/>
+          <a:p>
+            <a:pPr algn="ctr"/>
+          </a:p>
+        </p:txBody>
+      </p:sp>
+      <p:sp>
+        <p:nvSpPr>
+          <p:cNvPr id="11" name="번호 2"/>
+          <p:cNvSpPr/>
+          <p:nvPr/>
+        </p:nvSpPr>
+        <p:spPr>
+          <a:xfrm>
+            <a:off x="822959" y="3200400"/>
+            <a:ext cx="457200" cy="457200"/>
+          </a:xfrm>
+          <a:prstGeom prst="ellipse">
+            <a:avLst/>
+          </a:prstGeom>
+          <a:noFill/>
+          <a:ln w="19050">
+            <a:solidFill>
+              <a:srgbClr val="E1AC98"/>
+            </a:solidFill>
           </a:ln>
         </p:spPr>
         <p:txBody>
@@ -4852,7 +5140,7 @@
             <a:r>
               <a:rPr sz="1600" b="1" i="0">
                 <a:solidFill>
-                  <a:srgbClr val="FFFFFF"/>
+                  <a:srgbClr val="493027"/>
                 </a:solidFill>
               </a:rPr>
               <a:t>2</a:t>
@@ -4862,13 +5150,13 @@
       </p:sp>
       <p:sp>
         <p:nvSpPr>
-          <p:cNvPr id="10" name="TextBox 9"/>
+          <p:cNvPr id="12" name="TextBox 11"/>
           <p:cNvSpPr txBox="1"/>
           <p:nvPr/>
         </p:nvSpPr>
         <p:spPr>
           <a:xfrm>
-            <a:off x="1645919" y="2743200"/>
+            <a:off x="1508760" y="2971800"/>
             <a:ext cx="2743200" cy="914400"/>
           </a:xfrm>
           <a:prstGeom prst="rect">
@@ -4890,7 +5178,7 @@
             <a:r>
               <a:rPr sz="1800" b="1" i="0">
                 <a:solidFill>
-                  <a:srgbClr val="3B2017"/>
+                  <a:srgbClr val="493027"/>
                 </a:solidFill>
               </a:rPr>
               <a:t>약속 2</a:t>
@@ -4900,14 +5188,14 @@
       </p:sp>
       <p:sp>
         <p:nvSpPr>
-          <p:cNvPr id="11" name="TextBox 10"/>
+          <p:cNvPr id="13" name="TextBox 12"/>
           <p:cNvSpPr txBox="1"/>
           <p:nvPr/>
         </p:nvSpPr>
         <p:spPr>
           <a:xfrm>
-            <a:off x="4434840" y="2743200"/>
-            <a:ext cx="6796735" cy="914400"/>
+            <a:off x="4297680" y="2971800"/>
+            <a:ext cx="7071055" cy="914400"/>
           </a:xfrm>
           <a:prstGeom prst="rect">
             <a:avLst/>
@@ -4928,7 +5216,7 @@
             <a:r>
               <a:rPr sz="1700" b="0" i="0">
                 <a:solidFill>
-                  <a:srgbClr val="2B2B2B"/>
+                  <a:srgbClr val="26231F"/>
                 </a:solidFill>
               </a:rPr>
               <a:t>화가 나도 잠자리 전엔 풀기</a:t>
@@ -4938,56 +5226,54 @@
       </p:sp>
       <p:sp>
         <p:nvSpPr>
-          <p:cNvPr id="12" name="줄 3"/>
+          <p:cNvPr id="14" name="줄 3"/>
           <p:cNvSpPr/>
           <p:nvPr/>
         </p:nvSpPr>
         <p:spPr>
           <a:xfrm>
-            <a:off x="777240" y="3840480"/>
-            <a:ext cx="10637215" cy="1005840"/>
+            <a:off x="640080" y="4069080"/>
+            <a:ext cx="10911535" cy="1005840"/>
           </a:xfrm>
           <a:prstGeom prst="roundRect">
             <a:avLst>
-              <a:gd name="adj" fmla="val 8000"/>
+              <a:gd name="adj" fmla="val 7000"/>
             </a:avLst>
           </a:prstGeom>
           <a:solidFill>
-            <a:srgbClr val="F9F3F0"/>
-          </a:solidFill>
-          <a:ln w="12700">
-            <a:solidFill>
-              <a:srgbClr val="EFD9D1"/>
-            </a:solidFill>
-          </a:ln>
-        </p:spPr>
-        <p:txBody>
-          <a:bodyPr rtlCol="0" anchor="ctr"/>
-          <a:lstStyle/>
-          <a:p>
-            <a:pPr algn="ctr"/>
-          </a:p>
-        </p:txBody>
-      </p:sp>
-      <p:sp>
-        <p:nvSpPr>
-          <p:cNvPr id="13" name="번호 3"/>
-          <p:cNvSpPr/>
-          <p:nvPr/>
-        </p:nvSpPr>
-        <p:spPr>
-          <a:xfrm>
-            <a:off x="960120" y="4114800"/>
-            <a:ext cx="457200" cy="457200"/>
-          </a:xfrm>
-          <a:prstGeom prst="ellipse">
-            <a:avLst/>
-          </a:prstGeom>
-          <a:solidFill>
-            <a:srgbClr val="7D4531"/>
+            <a:srgbClr val="FBF0EC"/>
           </a:solidFill>
           <a:ln>
             <a:noFill/>
+          </a:ln>
+        </p:spPr>
+        <p:txBody>
+          <a:bodyPr rtlCol="0" anchor="ctr"/>
+          <a:lstStyle/>
+          <a:p>
+            <a:pPr algn="ctr"/>
+          </a:p>
+        </p:txBody>
+      </p:sp>
+      <p:sp>
+        <p:nvSpPr>
+          <p:cNvPr id="15" name="번호 3"/>
+          <p:cNvSpPr/>
+          <p:nvPr/>
+        </p:nvSpPr>
+        <p:spPr>
+          <a:xfrm>
+            <a:off x="822959" y="4343400"/>
+            <a:ext cx="457200" cy="457200"/>
+          </a:xfrm>
+          <a:prstGeom prst="ellipse">
+            <a:avLst/>
+          </a:prstGeom>
+          <a:noFill/>
+          <a:ln w="19050">
+            <a:solidFill>
+              <a:srgbClr val="E1AC98"/>
+            </a:solidFill>
           </a:ln>
         </p:spPr>
         <p:txBody>
@@ -5004,7 +5290,7 @@
             <a:r>
               <a:rPr sz="1600" b="1" i="0">
                 <a:solidFill>
-                  <a:srgbClr val="FFFFFF"/>
+                  <a:srgbClr val="493027"/>
                 </a:solidFill>
               </a:rPr>
               <a:t>3</a:t>
@@ -5014,13 +5300,13 @@
       </p:sp>
       <p:sp>
         <p:nvSpPr>
-          <p:cNvPr id="14" name="TextBox 13"/>
+          <p:cNvPr id="16" name="TextBox 15"/>
           <p:cNvSpPr txBox="1"/>
           <p:nvPr/>
         </p:nvSpPr>
         <p:spPr>
           <a:xfrm>
-            <a:off x="1645919" y="3886200"/>
+            <a:off x="1508760" y="4114800"/>
             <a:ext cx="2743200" cy="914400"/>
           </a:xfrm>
           <a:prstGeom prst="rect">
@@ -5042,7 +5328,7 @@
             <a:r>
               <a:rPr sz="1800" b="1" i="0">
                 <a:solidFill>
-                  <a:srgbClr val="3B2017"/>
+                  <a:srgbClr val="493027"/>
                 </a:solidFill>
               </a:rPr>
               <a:t>약속 3</a:t>
@@ -5052,14 +5338,14 @@
       </p:sp>
       <p:sp>
         <p:nvSpPr>
-          <p:cNvPr id="15" name="TextBox 14"/>
+          <p:cNvPr id="17" name="TextBox 16"/>
           <p:cNvSpPr txBox="1"/>
           <p:nvPr/>
         </p:nvSpPr>
         <p:spPr>
           <a:xfrm>
-            <a:off x="4434840" y="3886200"/>
-            <a:ext cx="6796735" cy="914400"/>
+            <a:off x="4297680" y="4114800"/>
+            <a:ext cx="7071055" cy="914400"/>
           </a:xfrm>
           <a:prstGeom prst="rect">
             <a:avLst/>
@@ -5080,7 +5366,7 @@
             <a:r>
               <a:rPr sz="1700" b="0" i="0">
                 <a:solidFill>
-                  <a:srgbClr val="2B2B2B"/>
+                  <a:srgbClr val="26231F"/>
                 </a:solidFill>
               </a:rPr>
               <a:t>한 달에 한 번 데이트하기</a:t>
@@ -5102,7 +5388,7 @@
     <p:bg>
       <p:bgPr>
         <a:solidFill>
-          <a:srgbClr val="EFD9D1"/>
+          <a:srgbClr val="F6DED5"/>
         </a:solidFill>
         <a:effectLst/>
       </p:bgPr>
@@ -5122,20 +5408,86 @@
         </p:nvSpPr>
         <p:spPr>
           <a:xfrm>
-            <a:off x="274320" y="274320"/>
-            <a:ext cx="11643055" cy="6309360"/>
+            <a:off x="640080" y="566928"/>
+            <a:ext cx="64008" cy="868680"/>
+          </a:xfrm>
+          <a:prstGeom prst="roundRect">
+            <a:avLst>
+              <a:gd name="adj" fmla="val 50000"/>
+            </a:avLst>
+          </a:prstGeom>
+          <a:solidFill>
+            <a:srgbClr val="E1AC98"/>
+          </a:solidFill>
+          <a:ln>
+            <a:noFill/>
+          </a:ln>
+        </p:spPr>
+        <p:txBody>
+          <a:bodyPr rtlCol="0" anchor="ctr"/>
+          <a:lstStyle/>
+          <a:p>
+            <a:pPr algn="ctr"/>
+          </a:p>
+        </p:txBody>
+      </p:sp>
+      <p:sp>
+        <p:nvSpPr>
+          <p:cNvPr id="4" name="상단 라벨"/>
+          <p:cNvSpPr txBox="1"/>
+          <p:nvPr/>
+        </p:nvSpPr>
+        <p:spPr>
+          <a:xfrm>
+            <a:off x="868680" y="274320"/>
+            <a:ext cx="5486400" cy="274320"/>
           </a:xfrm>
           <a:prstGeom prst="rect">
             <a:avLst/>
           </a:prstGeom>
+          <a:noFill/>
+        </p:spPr>
+        <p:txBody>
+          <a:bodyPr wrap="square" lIns="54864" rIns="54864" tIns="27432" bIns="27432" anchor="ctr">
+            <a:noAutofit/>
+          </a:bodyPr>
+          <a:lstStyle/>
+          <a:p>
+            <a:pPr algn="l">
+              <a:lnSpc>
+                <a:spcPct val="115000"/>
+              </a:lnSpc>
+            </a:pPr>
+            <a:r>
+              <a:rPr sz="900" b="1" i="0" spc="250">
+                <a:solidFill>
+                  <a:srgbClr val="8E8780"/>
+                </a:solidFill>
+              </a:rPr>
+              <a:t>FAMILY ALBUM</a:t>
+            </a:r>
+          </a:p>
+        </p:txBody>
+      </p:sp>
+      <p:sp>
+        <p:nvSpPr>
+          <p:cNvPr id="5" name="포인트"/>
+          <p:cNvSpPr/>
+          <p:nvPr/>
+        </p:nvSpPr>
+        <p:spPr>
+          <a:xfrm rot="18900000">
+            <a:off x="11167567" y="667512"/>
+            <a:ext cx="310896" cy="310896"/>
+          </a:xfrm>
+          <a:prstGeom prst="teardrop">
+            <a:avLst/>
+          </a:prstGeom>
           <a:solidFill>
-            <a:srgbClr val="FFFFFF"/>
+            <a:srgbClr val="EBBEAD"/>
           </a:solidFill>
-          <a:ln w="25400">
-            <a:solidFill>
-              <a:srgbClr val="7D4531"/>
-            </a:solidFill>
-            <a:prstDash val="dash"/>
+          <a:ln>
+            <a:noFill/>
           </a:ln>
         </p:spPr>
         <p:txBody>
@@ -5158,8 +5510,8 @@
         </p:nvSpPr>
         <p:spPr>
           <a:xfrm>
-            <a:off x="777240" y="548640"/>
-            <a:ext cx="9357055" cy="822960"/>
+            <a:off x="868680" y="566928"/>
+            <a:ext cx="9448495" cy="868680"/>
           </a:xfrm>
         </p:spPr>
         <p:txBody>
@@ -5176,7 +5528,7 @@
             <a:r>
               <a:rPr sz="3000" b="1" i="0">
                 <a:solidFill>
-                  <a:srgbClr val="3B2017"/>
+                  <a:srgbClr val="26231F"/>
                 </a:solidFill>
               </a:rPr>
               <a:t>가족 사진</a:t>
@@ -5186,14 +5538,14 @@
       </p:sp>
       <p:sp>
         <p:nvSpPr>
-          <p:cNvPr id="4" name="사진 자리"/>
+          <p:cNvPr id="6" name="사진 자리"/>
           <p:cNvSpPr/>
           <p:nvPr/>
         </p:nvSpPr>
         <p:spPr>
           <a:xfrm>
-            <a:off x="777240" y="1554480"/>
-            <a:ext cx="3423818" cy="2240279"/>
+            <a:off x="640080" y="1783080"/>
+            <a:ext cx="3515258" cy="2194560"/>
           </a:xfrm>
           <a:prstGeom prst="roundRect">
             <a:avLst>
@@ -5201,12 +5553,10 @@
             </a:avLst>
           </a:prstGeom>
           <a:solidFill>
-            <a:srgbClr val="EFD9D1"/>
+            <a:srgbClr val="F6DED5"/>
           </a:solidFill>
           <a:ln w="19050">
-            <a:solidFill>
-              <a:srgbClr val="7D4531"/>
-            </a:solidFill>
+            <a:noFill/>
             <a:prstDash val="dash"/>
           </a:ln>
         </p:spPr>
@@ -5224,7 +5574,7 @@
             <a:r>
               <a:rPr sz="1200" b="0" i="0">
                 <a:solidFill>
-                  <a:srgbClr val="3B2017"/>
+                  <a:srgbClr val="8E8780"/>
                 </a:solidFill>
               </a:rPr>
               <a:t>사진 1</a:t>
@@ -5234,14 +5584,14 @@
       </p:sp>
       <p:sp>
         <p:nvSpPr>
-          <p:cNvPr id="5" name="사진 자리"/>
+          <p:cNvPr id="7" name="사진 자리"/>
           <p:cNvSpPr/>
           <p:nvPr/>
         </p:nvSpPr>
         <p:spPr>
           <a:xfrm>
-            <a:off x="4383938" y="1554480"/>
-            <a:ext cx="3423818" cy="2240279"/>
+            <a:off x="4338218" y="1783080"/>
+            <a:ext cx="3515258" cy="2194560"/>
           </a:xfrm>
           <a:prstGeom prst="roundRect">
             <a:avLst>
@@ -5249,12 +5599,10 @@
             </a:avLst>
           </a:prstGeom>
           <a:solidFill>
-            <a:srgbClr val="EFD9D1"/>
+            <a:srgbClr val="F6DED5"/>
           </a:solidFill>
           <a:ln w="19050">
-            <a:solidFill>
-              <a:srgbClr val="7D4531"/>
-            </a:solidFill>
+            <a:noFill/>
             <a:prstDash val="dash"/>
           </a:ln>
         </p:spPr>
@@ -5272,7 +5620,7 @@
             <a:r>
               <a:rPr sz="1200" b="0" i="0">
                 <a:solidFill>
-                  <a:srgbClr val="3B2017"/>
+                  <a:srgbClr val="8E8780"/>
                 </a:solidFill>
               </a:rPr>
               <a:t>사진 2</a:t>
@@ -5282,14 +5630,14 @@
       </p:sp>
       <p:sp>
         <p:nvSpPr>
-          <p:cNvPr id="6" name="사진 자리"/>
+          <p:cNvPr id="8" name="사진 자리"/>
           <p:cNvSpPr/>
           <p:nvPr/>
         </p:nvSpPr>
         <p:spPr>
           <a:xfrm>
-            <a:off x="7990636" y="1554480"/>
-            <a:ext cx="3423818" cy="2240279"/>
+            <a:off x="8036356" y="1783080"/>
+            <a:ext cx="3515258" cy="2194560"/>
           </a:xfrm>
           <a:prstGeom prst="roundRect">
             <a:avLst>
@@ -5297,12 +5645,10 @@
             </a:avLst>
           </a:prstGeom>
           <a:solidFill>
-            <a:srgbClr val="EFD9D1"/>
+            <a:srgbClr val="F6DED5"/>
           </a:solidFill>
           <a:ln w="19050">
-            <a:solidFill>
-              <a:srgbClr val="7D4531"/>
-            </a:solidFill>
+            <a:noFill/>
             <a:prstDash val="dash"/>
           </a:ln>
         </p:spPr>
@@ -5320,7 +5666,7 @@
             <a:r>
               <a:rPr sz="1200" b="0" i="0">
                 <a:solidFill>
-                  <a:srgbClr val="3B2017"/>
+                  <a:srgbClr val="8E8780"/>
                 </a:solidFill>
               </a:rPr>
               <a:t>사진 3</a:t>
@@ -5330,14 +5676,14 @@
       </p:sp>
       <p:sp>
         <p:nvSpPr>
-          <p:cNvPr id="7" name="사진 자리"/>
+          <p:cNvPr id="9" name="사진 자리"/>
           <p:cNvSpPr/>
           <p:nvPr/>
         </p:nvSpPr>
         <p:spPr>
           <a:xfrm>
-            <a:off x="777240" y="3977639"/>
-            <a:ext cx="3423818" cy="2240279"/>
+            <a:off x="640080" y="4160520"/>
+            <a:ext cx="3515258" cy="2194560"/>
           </a:xfrm>
           <a:prstGeom prst="roundRect">
             <a:avLst>
@@ -5345,12 +5691,10 @@
             </a:avLst>
           </a:prstGeom>
           <a:solidFill>
-            <a:srgbClr val="EFD9D1"/>
+            <a:srgbClr val="F6DED5"/>
           </a:solidFill>
           <a:ln w="19050">
-            <a:solidFill>
-              <a:srgbClr val="7D4531"/>
-            </a:solidFill>
+            <a:noFill/>
             <a:prstDash val="dash"/>
           </a:ln>
         </p:spPr>
@@ -5368,7 +5712,7 @@
             <a:r>
               <a:rPr sz="1200" b="0" i="0">
                 <a:solidFill>
-                  <a:srgbClr val="3B2017"/>
+                  <a:srgbClr val="8E8780"/>
                 </a:solidFill>
               </a:rPr>
               <a:t>사진 4</a:t>
@@ -5378,14 +5722,14 @@
       </p:sp>
       <p:sp>
         <p:nvSpPr>
-          <p:cNvPr id="8" name="사진 자리"/>
+          <p:cNvPr id="10" name="사진 자리"/>
           <p:cNvSpPr/>
           <p:nvPr/>
         </p:nvSpPr>
         <p:spPr>
           <a:xfrm>
-            <a:off x="4383938" y="3977639"/>
-            <a:ext cx="3423818" cy="2240279"/>
+            <a:off x="4338218" y="4160520"/>
+            <a:ext cx="3515258" cy="2194560"/>
           </a:xfrm>
           <a:prstGeom prst="roundRect">
             <a:avLst>
@@ -5393,12 +5737,10 @@
             </a:avLst>
           </a:prstGeom>
           <a:solidFill>
-            <a:srgbClr val="EFD9D1"/>
+            <a:srgbClr val="F6DED5"/>
           </a:solidFill>
           <a:ln w="19050">
-            <a:solidFill>
-              <a:srgbClr val="7D4531"/>
-            </a:solidFill>
+            <a:noFill/>
             <a:prstDash val="dash"/>
           </a:ln>
         </p:spPr>
@@ -5416,7 +5758,7 @@
             <a:r>
               <a:rPr sz="1200" b="0" i="0">
                 <a:solidFill>
-                  <a:srgbClr val="3B2017"/>
+                  <a:srgbClr val="8E8780"/>
                 </a:solidFill>
               </a:rPr>
               <a:t>사진 5</a:t>
@@ -5426,14 +5768,14 @@
       </p:sp>
       <p:sp>
         <p:nvSpPr>
-          <p:cNvPr id="9" name="사진 자리"/>
+          <p:cNvPr id="11" name="사진 자리"/>
           <p:cNvSpPr/>
           <p:nvPr/>
         </p:nvSpPr>
         <p:spPr>
           <a:xfrm>
-            <a:off x="7990636" y="3977639"/>
-            <a:ext cx="3423818" cy="2240279"/>
+            <a:off x="8036356" y="4160520"/>
+            <a:ext cx="3515258" cy="2194560"/>
           </a:xfrm>
           <a:prstGeom prst="roundRect">
             <a:avLst>
@@ -5441,12 +5783,10 @@
             </a:avLst>
           </a:prstGeom>
           <a:solidFill>
-            <a:srgbClr val="EFD9D1"/>
+            <a:srgbClr val="F6DED5"/>
           </a:solidFill>
           <a:ln w="19050">
-            <a:solidFill>
-              <a:srgbClr val="7D4531"/>
-            </a:solidFill>
+            <a:noFill/>
             <a:prstDash val="dash"/>
           </a:ln>
         </p:spPr>
@@ -5464,7 +5804,7 @@
             <a:r>
               <a:rPr sz="1200" b="0" i="0">
                 <a:solidFill>
-                  <a:srgbClr val="3B2017"/>
+                  <a:srgbClr val="8E8780"/>
                 </a:solidFill>
               </a:rPr>
               <a:t>사진 6</a:t>
@@ -5483,6 +5823,14 @@
 <file path=ppt/slides/slide6.xml><?xml version="1.0" encoding="utf-8"?>
 <p:sld xmlns:a="http://schemas.openxmlformats.org/drawingml/2006/main" xmlns:p="http://schemas.openxmlformats.org/presentationml/2006/main" xmlns:r="http://schemas.openxmlformats.org/officeDocument/2006/relationships">
   <p:cSld>
+    <p:bg>
+      <p:bgPr>
+        <a:solidFill>
+          <a:srgbClr val="FBF0EC"/>
+        </a:solidFill>
+        <a:effectLst/>
+      </p:bgPr>
+    </p:bg>
     <p:spTree>
       <p:nvGrpSpPr>
         <p:cNvPr id="1" name=""/>
@@ -5490,30 +5838,120 @@
         <p:nvPr/>
       </p:nvGrpSpPr>
       <p:grpSpPr/>
-      <p:pic>
-        <p:nvPicPr>
-          <p:cNvPr id="3" name="표지 그림" descr="family-41.jpg"/>
-          <p:cNvPicPr>
-            <a:picLocks noChangeAspect="1"/>
-          </p:cNvPicPr>
+      <p:sp>
+        <p:nvSpPr>
+          <p:cNvPr id="3" name="사진 자리"/>
+          <p:cNvSpPr/>
           <p:nvPr/>
-        </p:nvPicPr>
-        <p:blipFill>
-          <a:blip r:embed="rId2"/>
-          <a:stretch>
-            <a:fillRect/>
-          </a:stretch>
-        </p:blipFill>
-        <p:spPr>
-          <a:xfrm>
-            <a:off x="0" y="0"/>
-            <a:ext cx="12191695" cy="6858000"/>
+        </p:nvSpPr>
+        <p:spPr>
+          <a:xfrm>
+            <a:off x="1463003" y="960120"/>
+            <a:ext cx="3657508" cy="4526280"/>
+          </a:xfrm>
+          <a:prstGeom prst="roundRect">
+            <a:avLst>
+              <a:gd name="adj" fmla="val 4000"/>
+            </a:avLst>
+          </a:prstGeom>
+          <a:solidFill>
+            <a:srgbClr val="EBBEAD"/>
+          </a:solidFill>
+          <a:ln>
+            <a:noFill/>
+          </a:ln>
+        </p:spPr>
+        <p:txBody>
+          <a:bodyPr rtlCol="0" anchor="ctr" wrap="square" lIns="54864" rIns="54864" tIns="27432" bIns="27432">
+            <a:noAutofit/>
+          </a:bodyPr>
+          <a:lstStyle/>
+          <a:p>
+            <a:pPr algn="ctr">
+              <a:lnSpc>
+                <a:spcPct val="100000"/>
+              </a:lnSpc>
+            </a:pPr>
+            <a:r>
+              <a:rPr sz="1400" b="0" i="0">
+                <a:solidFill>
+                  <a:srgbClr val="493027"/>
+                </a:solidFill>
+              </a:rPr>
+              <a:t>사진을 넣어 주세요</a:t>
+            </a:r>
+          </a:p>
+        </p:txBody>
+      </p:sp>
+      <p:sp>
+        <p:nvSpPr>
+          <p:cNvPr id="4" name="장식"/>
+          <p:cNvSpPr/>
+          <p:nvPr/>
+        </p:nvSpPr>
+        <p:spPr>
+          <a:xfrm>
+            <a:off x="975335" y="1234439"/>
+            <a:ext cx="3657508" cy="4526280"/>
+          </a:xfrm>
+          <a:prstGeom prst="roundRect">
+            <a:avLst>
+              <a:gd name="adj" fmla="val 4000"/>
+            </a:avLst>
+          </a:prstGeom>
+          <a:noFill/>
+          <a:ln w="9525">
+            <a:solidFill>
+              <a:srgbClr val="26231F"/>
+            </a:solidFill>
+          </a:ln>
+        </p:spPr>
+        <p:txBody>
+          <a:bodyPr rtlCol="0" anchor="ctr"/>
+          <a:lstStyle/>
+          <a:p>
+            <a:pPr algn="ctr"/>
+          </a:p>
+        </p:txBody>
+      </p:sp>
+      <p:sp>
+        <p:nvSpPr>
+          <p:cNvPr id="5" name="라벨"/>
+          <p:cNvSpPr txBox="1"/>
+          <p:nvPr/>
+        </p:nvSpPr>
+        <p:spPr>
+          <a:xfrm>
+            <a:off x="6827349" y="2148840"/>
+            <a:ext cx="4632844" cy="274320"/>
           </a:xfrm>
           <a:prstGeom prst="rect">
             <a:avLst/>
           </a:prstGeom>
-        </p:spPr>
-      </p:pic>
+          <a:noFill/>
+        </p:spPr>
+        <p:txBody>
+          <a:bodyPr wrap="square" lIns="54864" rIns="54864" tIns="27432" bIns="27432" anchor="t">
+            <a:noAutofit/>
+          </a:bodyPr>
+          <a:lstStyle/>
+          <a:p>
+            <a:pPr algn="l">
+              <a:lnSpc>
+                <a:spcPct val="115000"/>
+              </a:lnSpc>
+            </a:pPr>
+            <a:r>
+              <a:rPr sz="1000" b="1" i="0" spc="250">
+                <a:solidFill>
+                  <a:srgbClr val="26231F"/>
+                </a:solidFill>
+              </a:rPr>
+              <a:t>FAMILY ALBUM</a:t>
+            </a:r>
+          </a:p>
+        </p:txBody>
+      </p:sp>
       <p:sp>
         <p:nvSpPr>
           <p:cNvPr id="2" name="Title 1"/>
@@ -5526,8 +5964,8 @@
         </p:nvSpPr>
         <p:spPr>
           <a:xfrm>
-            <a:off x="853418" y="2057400"/>
-            <a:ext cx="6095847" cy="1554480"/>
+            <a:off x="6827349" y="2606040"/>
+            <a:ext cx="4632844" cy="1188720"/>
           </a:xfrm>
         </p:spPr>
         <p:txBody>
@@ -5542,9 +5980,9 @@
               </a:lnSpc>
             </a:pPr>
             <a:r>
-              <a:rPr sz="3600" b="1" i="0">
-                <a:solidFill>
-                  <a:srgbClr val="3B2017"/>
+              <a:rPr sz="4000" b="1" i="0">
+                <a:solidFill>
+                  <a:srgbClr val="26231F"/>
                 </a:solidFill>
               </a:rPr>
               <a:t>우리 가족 소개를 마칩니다</a:t>
@@ -5554,14 +5992,14 @@
       </p:sp>
       <p:sp>
         <p:nvSpPr>
-          <p:cNvPr id="4" name="한 줄 문구"/>
+          <p:cNvPr id="6" name="한 줄 문구"/>
           <p:cNvSpPr txBox="1"/>
           <p:nvPr/>
         </p:nvSpPr>
         <p:spPr>
           <a:xfrm>
-            <a:off x="853418" y="3749039"/>
-            <a:ext cx="6095847" cy="822960"/>
+            <a:off x="6827349" y="3886200"/>
+            <a:ext cx="4632844" cy="822960"/>
           </a:xfrm>
           <a:prstGeom prst="rect">
             <a:avLst/>
@@ -5580,9 +6018,9 @@
               </a:lnSpc>
             </a:pPr>
             <a:r>
-              <a:rPr sz="1700" b="0" i="1">
-                <a:solidFill>
-                  <a:srgbClr val="3B2017"/>
+              <a:rPr sz="1700" b="0" i="0">
+                <a:solidFill>
+                  <a:srgbClr val="26231F"/>
                 </a:solidFill>
               </a:rPr>
               <a:t>읽어 주셔서 고맙습니다</a:t>
@@ -5592,14 +6030,14 @@
       </p:sp>
       <p:sp>
         <p:nvSpPr>
-          <p:cNvPr id="5" name="안내 문구"/>
+          <p:cNvPr id="7" name="안내 문구"/>
           <p:cNvSpPr txBox="1"/>
           <p:nvPr/>
         </p:nvSpPr>
         <p:spPr>
           <a:xfrm>
-            <a:off x="853418" y="4617720"/>
-            <a:ext cx="6095847" cy="914400"/>
+            <a:off x="6827349" y="4754880"/>
+            <a:ext cx="4632844" cy="914400"/>
           </a:xfrm>
           <a:prstGeom prst="rect">
             <a:avLst/>
@@ -5620,7 +6058,7 @@
             <a:r>
               <a:rPr sz="1400" b="0" i="0">
                 <a:solidFill>
-                  <a:srgbClr val="666666"/>
+                  <a:srgbClr val="26231F"/>
                 </a:solidFill>
               </a:rPr>
               <a:t>고맙습니다 · 가족 이름</a:t>
@@ -5647,34 +6085,34 @@
         <a:sysClr val="window" lastClr="FFFFFF"/>
       </a:lt1>
       <a:dk2>
-        <a:srgbClr val="3B2017"/>
+        <a:srgbClr val="493027"/>
       </a:dk2>
       <a:lt2>
-        <a:srgbClr val="F9F3F0"/>
+        <a:srgbClr val="FBF0EC"/>
       </a:lt2>
       <a:accent1>
-        <a:srgbClr val="7D4531"/>
+        <a:srgbClr val="E1AC98"/>
       </a:accent1>
       <a:accent2>
-        <a:srgbClr val="3B917D"/>
+        <a:srgbClr val="EADDB8"/>
       </a:accent2>
       <a:accent3>
-        <a:srgbClr val="3B2017"/>
+        <a:srgbClr val="493027"/>
       </a:accent3>
       <a:accent4>
-        <a:srgbClr val="EFD9D1"/>
+        <a:srgbClr val="F6DED5"/>
       </a:accent4>
       <a:accent5>
-        <a:srgbClr val="5C6B57"/>
+        <a:srgbClr val="E6C4A8"/>
       </a:accent5>
       <a:accent6>
-        <a:srgbClr val="897974"/>
+        <a:srgbClr val="92837D"/>
       </a:accent6>
       <a:hlink>
-        <a:srgbClr val="7D4531"/>
+        <a:srgbClr val="E1AC98"/>
       </a:hlink>
       <a:folHlink>
-        <a:srgbClr val="3B2017"/>
+        <a:srgbClr val="493027"/>
       </a:folHlink>
     </a:clrScheme>
     <a:fontScheme name="Office">
